--- a/teaching-pack/04-M03-hallucination/M03-slides-hallucination.pptx
+++ b/teaching-pack/04-M03-hallucination/M03-slides-hallucination.pptx
@@ -10329,8 +10329,8 @@
         </p:blipFill>
         <p:spPr>
           <a:xfrm>
-            <a:off x="3023044" y="1883664"/>
-            <a:ext cx="6145607" cy="3383280"/>
+            <a:off x="3069766" y="1883664"/>
+            <a:ext cx="6052162" cy="3383280"/>
           </a:xfrm>
           <a:prstGeom prst="rect">
             <a:avLst/>

--- a/teaching-pack/04-M03-hallucination/M03-slides-hallucination.pptx
+++ b/teaching-pack/04-M03-hallucination/M03-slides-hallucination.pptx
@@ -10329,8 +10329,8 @@
         </p:blipFill>
         <p:spPr>
           <a:xfrm>
-            <a:off x="3069766" y="1883664"/>
-            <a:ext cx="6052162" cy="3383280"/>
+            <a:off x="3023044" y="1883664"/>
+            <a:ext cx="6145607" cy="3383280"/>
           </a:xfrm>
           <a:prstGeom prst="rect">
             <a:avLst/>
